--- a/index/designs/y8-l7/l5-art-vocab-text2/l5-art-vocab-text2.pptx
+++ b/index/designs/y8-l7/l5-art-vocab-text2/l5-art-vocab-text2.pptx
@@ -2071,15 +2071,6 @@
               </a:rPr>
               <a:t>阅读</a:t>
             </a:r>
-            <a:pPr algn="ctr" indent="0" marL="0">
-              <a:lnSpc>
-                <a:spcPts val="8000"/>
-              </a:lnSpc>
-              <a:spcAft>
-                <a:spcPts val="800"/>
-              </a:spcAft>
-              <a:buNone/>
-            </a:pPr>
             <a:r>
               <a:rPr lang="en-US" sz="8000" b="1" dirty="0">
                 <a:solidFill>
@@ -2091,15 +2082,6 @@
               </a:rPr>
               <a:t>·</a:t>
             </a:r>
-            <a:pPr algn="ctr" indent="0" marL="0">
-              <a:lnSpc>
-                <a:spcPts val="8000"/>
-              </a:lnSpc>
-              <a:spcAft>
-                <a:spcPts val="800"/>
-              </a:spcAft>
-              <a:buNone/>
-            </a:pPr>
             <a:r>
               <a:rPr lang="en-US" sz="8000" dirty="0">
                 <a:solidFill>
@@ -3540,12 +3522,6 @@
               </a:rPr>
               <a:t>我</a:t>
             </a:r>
-            <a:pPr algn="l" indent="0" marL="0">
-              <a:lnSpc>
-                <a:spcPts val="2400"/>
-              </a:lnSpc>
-              <a:buNone/>
-            </a:pPr>
             <a:r>
               <a:rPr lang="en-US" sz="1500" b="1" dirty="0">
                 <a:solidFill>
@@ -3557,12 +3533,6 @@
               </a:rPr>
               <a:t>（不）</a:t>
             </a:r>
-            <a:pPr algn="l" indent="0" marL="0">
-              <a:lnSpc>
-                <a:spcPts val="2400"/>
-              </a:lnSpc>
-              <a:buNone/>
-            </a:pPr>
             <a:r>
               <a:rPr lang="en-US" sz="1500" dirty="0">
                 <a:solidFill>
@@ -3574,12 +3544,6 @@
               </a:rPr>
               <a:t>喜欢看</a:t>
             </a:r>
-            <a:pPr algn="l" indent="0" marL="0">
-              <a:lnSpc>
-                <a:spcPts val="2400"/>
-              </a:lnSpc>
-              <a:buNone/>
-            </a:pPr>
             <a:r>
               <a:rPr lang="en-US" sz="1500" dirty="0">
                 <a:solidFill>
@@ -4615,12 +4579,6 @@
               </a:rPr>
               <a:t>Write a </a:t>
             </a:r>
-            <a:pPr algn="l" indent="0" marL="0">
-              <a:lnSpc>
-                <a:spcPts val="1485"/>
-              </a:lnSpc>
-              <a:buNone/>
-            </a:pPr>
             <a:r>
               <a:rPr lang="en-US" sz="1100" b="1" dirty="0">
                 <a:solidFill>
@@ -4632,12 +4590,6 @@
               </a:rPr>
               <a:t>4–5 sentence paragraph</a:t>
             </a:r>
-            <a:pPr algn="l" indent="0" marL="0">
-              <a:lnSpc>
-                <a:spcPts val="1485"/>
-              </a:lnSpc>
-              <a:buNone/>
-            </a:pPr>
             <a:r>
               <a:rPr lang="en-US" sz="1100" dirty="0">
                 <a:solidFill>
@@ -4798,9 +4750,6 @@
               </a:rPr>
               <a:t>我喜欢</a:t>
             </a:r>
-            <a:pPr algn="l" indent="0" marL="0">
-              <a:buNone/>
-            </a:pPr>
             <a:r>
               <a:rPr lang="en-US" sz="1400" dirty="0">
                 <a:solidFill>
@@ -4961,9 +4910,6 @@
               </a:rPr>
               <a:t>我不太喜欢</a:t>
             </a:r>
-            <a:pPr algn="l" indent="0" marL="0">
-              <a:buNone/>
-            </a:pPr>
             <a:r>
               <a:rPr lang="en-US" sz="1400" dirty="0">
                 <a:solidFill>
@@ -5273,9 +5219,6 @@
               </a:rPr>
               <a:t>我正在学</a:t>
             </a:r>
-            <a:pPr algn="l" indent="0" marL="0">
-              <a:buNone/>
-            </a:pPr>
             <a:r>
               <a:rPr lang="en-US" sz="1400" dirty="0">
                 <a:solidFill>
@@ -6405,12 +6348,6 @@
               </a:rPr>
               <a:t>Can you name 3 painting types? </a:t>
             </a:r>
-            <a:pPr algn="l" indent="0" marL="0">
-              <a:lnSpc>
-                <a:spcPts val="1680"/>
-              </a:lnSpc>
-              <a:buNone/>
-            </a:pPr>
             <a:r>
               <a:rPr lang="en-US" sz="1200" b="1" dirty="0">
                 <a:solidFill>
@@ -6571,12 +6508,6 @@
               </a:rPr>
               <a:t>Can you say what you like to read? </a:t>
             </a:r>
-            <a:pPr algn="l" indent="0" marL="0">
-              <a:lnSpc>
-                <a:spcPts val="1680"/>
-              </a:lnSpc>
-              <a:buNone/>
-            </a:pPr>
             <a:r>
               <a:rPr lang="en-US" sz="1200" b="1" dirty="0">
                 <a:solidFill>
@@ -7604,12 +7535,6 @@
               </a:rPr>
               <a:t>How to say something is happening </a:t>
             </a:r>
-            <a:pPr algn="ctr" indent="0" marL="0">
-              <a:spcAft>
-                <a:spcPts val="2400"/>
-              </a:spcAft>
-              <a:buNone/>
-            </a:pPr>
             <a:r>
               <a:rPr lang="en-US" sz="1400" i="1" dirty="0">
                 <a:solidFill>
@@ -7702,15 +7627,6 @@
               </a:rPr>
               <a:t>他</a:t>
             </a:r>
-            <a:pPr algn="ctr" indent="0" marL="0">
-              <a:lnSpc>
-                <a:spcPts val="4560"/>
-              </a:lnSpc>
-              <a:spcAft>
-                <a:spcPts val="1400"/>
-              </a:spcAft>
-              <a:buNone/>
-            </a:pPr>
             <a:r>
               <a:rPr lang="en-US" sz="3800" b="1" dirty="0">
                 <a:solidFill>
@@ -7722,15 +7638,6 @@
               </a:rPr>
               <a:t>正在</a:t>
             </a:r>
-            <a:pPr algn="ctr" indent="0" marL="0">
-              <a:lnSpc>
-                <a:spcPts val="4560"/>
-              </a:lnSpc>
-              <a:spcAft>
-                <a:spcPts val="1400"/>
-              </a:spcAft>
-              <a:buNone/>
-            </a:pPr>
             <a:r>
               <a:rPr lang="en-US" sz="3800" b="1" dirty="0">
                 <a:solidFill>
@@ -7742,15 +7649,6 @@
               </a:rPr>
               <a:t>弹钢琴</a:t>
             </a:r>
-            <a:pPr algn="ctr" indent="0" marL="0">
-              <a:lnSpc>
-                <a:spcPts val="4560"/>
-              </a:lnSpc>
-              <a:spcAft>
-                <a:spcPts val="1400"/>
-              </a:spcAft>
-              <a:buNone/>
-            </a:pPr>
             <a:r>
               <a:rPr lang="en-US" sz="3800" dirty="0">
                 <a:solidFill>
@@ -8255,9 +8153,6 @@
               </a:rPr>
               <a:t>Next lesson: </a:t>
             </a:r>
-            <a:pPr algn="ctr" indent="0" marL="0">
-              <a:buNone/>
-            </a:pPr>
             <a:r>
               <a:rPr lang="en-US" sz="1300" b="1" dirty="0">
                 <a:solidFill>
@@ -8269,9 +8164,6 @@
               </a:rPr>
               <a:t>正在 + verb</a:t>
             </a:r>
-            <a:pPr algn="ctr" indent="0" marL="0">
-              <a:buNone/>
-            </a:pPr>
             <a:r>
               <a:rPr lang="en-US" sz="1300" dirty="0">
                 <a:solidFill>
@@ -9147,12 +9039,6 @@
               </a:rPr>
               <a:t>Write a word with </a:t>
             </a:r>
-            <a:pPr algn="l" indent="0" marL="0">
-              <a:lnSpc>
-                <a:spcPts val="1350"/>
-              </a:lnSpc>
-              <a:buNone/>
-            </a:pPr>
             <a:r>
               <a:rPr lang="en-US" sz="1000" b="1" dirty="0">
                 <a:solidFill>
@@ -9164,12 +9050,6 @@
               </a:rPr>
               <a:t>ao</a:t>
             </a:r>
-            <a:pPr algn="l" indent="0" marL="0">
-              <a:lnSpc>
-                <a:spcPts val="1350"/>
-              </a:lnSpc>
-              <a:buNone/>
-            </a:pPr>
             <a:r>
               <a:rPr lang="en-US" sz="1000" dirty="0">
                 <a:solidFill>
@@ -9181,12 +9061,6 @@
               </a:rPr>
               <a:t> and a word with </a:t>
             </a:r>
-            <a:pPr algn="l" indent="0" marL="0">
-              <a:lnSpc>
-                <a:spcPts val="1350"/>
-              </a:lnSpc>
-              <a:buNone/>
-            </a:pPr>
             <a:r>
               <a:rPr lang="en-US" sz="1000" b="1" dirty="0">
                 <a:solidFill>
@@ -9198,12 +9072,6 @@
               </a:rPr>
               <a:t>ou</a:t>
             </a:r>
-            <a:pPr algn="l" indent="0" marL="0">
-              <a:lnSpc>
-                <a:spcPts val="1350"/>
-              </a:lnSpc>
-              <a:buNone/>
-            </a:pPr>
             <a:r>
               <a:rPr lang="en-US" sz="1000" dirty="0">
                 <a:solidFill>
@@ -9403,12 +9271,6 @@
               </a:rPr>
               <a:t>What does </a:t>
             </a:r>
-            <a:pPr algn="l" indent="0" marL="0">
-              <a:lnSpc>
-                <a:spcPts val="1755"/>
-              </a:lnSpc>
-              <a:buNone/>
-            </a:pPr>
             <a:r>
               <a:rPr lang="en-US" sz="1300" b="1" dirty="0">
                 <a:solidFill>
@@ -9420,12 +9282,6 @@
               </a:rPr>
               <a:t>爱好</a:t>
             </a:r>
-            <a:pPr algn="l" indent="0" marL="0">
-              <a:lnSpc>
-                <a:spcPts val="1755"/>
-              </a:lnSpc>
-              <a:buNone/>
-            </a:pPr>
             <a:r>
               <a:rPr lang="en-US" sz="1000" dirty="0">
                 <a:solidFill>
@@ -9571,12 +9427,6 @@
               </a:rPr>
               <a:t>We've been talking about </a:t>
             </a:r>
-            <a:pPr algn="l" indent="0" marL="0">
-              <a:lnSpc>
-                <a:spcPts val="1595"/>
-              </a:lnSpc>
-              <a:buNone/>
-            </a:pPr>
             <a:r>
               <a:rPr lang="en-US" sz="1100" b="1" dirty="0">
                 <a:solidFill>
@@ -9588,12 +9438,6 @@
               </a:rPr>
               <a:t>music hobbies</a:t>
             </a:r>
-            <a:pPr algn="l" indent="0" marL="0">
-              <a:lnSpc>
-                <a:spcPts val="1595"/>
-              </a:lnSpc>
-              <a:buNone/>
-            </a:pPr>
             <a:r>
               <a:rPr lang="en-US" sz="1100" dirty="0">
                 <a:solidFill>
@@ -9605,12 +9449,6 @@
               </a:rPr>
               <a:t>. Today we add </a:t>
             </a:r>
-            <a:pPr algn="l" indent="0" marL="0">
-              <a:lnSpc>
-                <a:spcPts val="1595"/>
-              </a:lnSpc>
-              <a:buNone/>
-            </a:pPr>
             <a:r>
               <a:rPr lang="en-US" sz="1100" b="1" dirty="0">
                 <a:solidFill>
@@ -9622,12 +9460,6 @@
               </a:rPr>
               <a:t>reading and art hobbies</a:t>
             </a:r>
-            <a:pPr algn="l" indent="0" marL="0">
-              <a:lnSpc>
-                <a:spcPts val="1595"/>
-              </a:lnSpc>
-              <a:buNone/>
-            </a:pPr>
             <a:r>
               <a:rPr lang="en-US" sz="1100" dirty="0">
                 <a:solidFill>
@@ -9639,12 +9471,6 @@
               </a:rPr>
               <a:t> — and meet two new grammar words: </a:t>
             </a:r>
-            <a:pPr algn="l" indent="0" marL="0">
-              <a:lnSpc>
-                <a:spcPts val="1595"/>
-              </a:lnSpc>
-              <a:buNone/>
-            </a:pPr>
             <a:r>
               <a:rPr lang="en-US" sz="1100" b="1" dirty="0">
                 <a:solidFill>
@@ -9656,12 +9482,6 @@
               </a:rPr>
               <a:t>都</a:t>
             </a:r>
-            <a:pPr algn="l" indent="0" marL="0">
-              <a:lnSpc>
-                <a:spcPts val="1595"/>
-              </a:lnSpc>
-              <a:buNone/>
-            </a:pPr>
             <a:r>
               <a:rPr lang="en-US" sz="1100" dirty="0">
                 <a:solidFill>
@@ -9673,12 +9493,6 @@
               </a:rPr>
               <a:t> and </a:t>
             </a:r>
-            <a:pPr algn="l" indent="0" marL="0">
-              <a:lnSpc>
-                <a:spcPts val="1595"/>
-              </a:lnSpc>
-              <a:buNone/>
-            </a:pPr>
             <a:r>
               <a:rPr lang="en-US" sz="1100" b="1" dirty="0">
                 <a:solidFill>
@@ -9690,12 +9504,6 @@
               </a:rPr>
               <a:t>正在</a:t>
             </a:r>
-            <a:pPr algn="l" indent="0" marL="0">
-              <a:lnSpc>
-                <a:spcPts val="1595"/>
-              </a:lnSpc>
-              <a:buNone/>
-            </a:pPr>
             <a:r>
               <a:rPr lang="en-US" sz="1100" dirty="0">
                 <a:solidFill>
@@ -10183,12 +9991,6 @@
               </a:rPr>
               <a:t>We are learning to </a:t>
             </a:r>
-            <a:pPr algn="l" indent="0" marL="0">
-              <a:lnSpc>
-                <a:spcPts val="1890"/>
-              </a:lnSpc>
-              <a:buNone/>
-            </a:pPr>
             <a:r>
               <a:rPr lang="en-US" sz="1400" b="1" dirty="0">
                 <a:solidFill>
@@ -10200,12 +10002,6 @@
               </a:rPr>
               <a:t>talk about reading and art hobbies</a:t>
             </a:r>
-            <a:pPr algn="l" indent="0" marL="0">
-              <a:lnSpc>
-                <a:spcPts val="1890"/>
-              </a:lnSpc>
-              <a:buNone/>
-            </a:pPr>
             <a:r>
               <a:rPr lang="en-US" sz="1400" dirty="0">
                 <a:solidFill>
@@ -10374,12 +10170,6 @@
               </a:rPr>
               <a:t>Name 3 types of paintings in Chinese: </a:t>
             </a:r>
-            <a:pPr algn="l" indent="0" marL="0">
-              <a:lnSpc>
-                <a:spcPts val="1820"/>
-              </a:lnSpc>
-              <a:buNone/>
-            </a:pPr>
             <a:r>
               <a:rPr lang="en-US" sz="1300" dirty="0">
                 <a:solidFill>
@@ -10391,12 +10181,6 @@
               </a:rPr>
               <a:t>国画儿</a:t>
             </a:r>
-            <a:pPr algn="l" indent="0" marL="0">
-              <a:lnSpc>
-                <a:spcPts val="1820"/>
-              </a:lnSpc>
-              <a:buNone/>
-            </a:pPr>
             <a:r>
               <a:rPr lang="en-US" sz="1300" dirty="0">
                 <a:solidFill>
@@ -10408,12 +10192,6 @@
               </a:rPr>
               <a:t>，</a:t>
             </a:r>
-            <a:pPr algn="l" indent="0" marL="0">
-              <a:lnSpc>
-                <a:spcPts val="1820"/>
-              </a:lnSpc>
-              <a:buNone/>
-            </a:pPr>
             <a:r>
               <a:rPr lang="en-US" sz="1300" dirty="0">
                 <a:solidFill>
@@ -10425,12 +10203,6 @@
               </a:rPr>
               <a:t>油画儿</a:t>
             </a:r>
-            <a:pPr algn="l" indent="0" marL="0">
-              <a:lnSpc>
-                <a:spcPts val="1820"/>
-              </a:lnSpc>
-              <a:buNone/>
-            </a:pPr>
             <a:r>
               <a:rPr lang="en-US" sz="1300" dirty="0">
                 <a:solidFill>
@@ -10442,12 +10214,6 @@
               </a:rPr>
               <a:t>，</a:t>
             </a:r>
-            <a:pPr algn="l" indent="0" marL="0">
-              <a:lnSpc>
-                <a:spcPts val="1820"/>
-              </a:lnSpc>
-              <a:buNone/>
-            </a:pPr>
             <a:r>
               <a:rPr lang="en-US" sz="1300" dirty="0">
                 <a:solidFill>
@@ -10574,12 +10340,6 @@
               </a:rPr>
               <a:t>Say what I like to read: </a:t>
             </a:r>
-            <a:pPr algn="l" indent="0" marL="0">
-              <a:lnSpc>
-                <a:spcPts val="1820"/>
-              </a:lnSpc>
-              <a:buNone/>
-            </a:pPr>
             <a:r>
               <a:rPr lang="en-US" sz="1300" dirty="0">
                 <a:solidFill>
@@ -10591,12 +10351,6 @@
               </a:rPr>
               <a:t>小说</a:t>
             </a:r>
-            <a:pPr algn="l" indent="0" marL="0">
-              <a:lnSpc>
-                <a:spcPts val="1820"/>
-              </a:lnSpc>
-              <a:buNone/>
-            </a:pPr>
             <a:r>
               <a:rPr lang="en-US" sz="1300" dirty="0">
                 <a:solidFill>
@@ -10608,12 +10362,6 @@
               </a:rPr>
               <a:t> (novel) and </a:t>
             </a:r>
-            <a:pPr algn="l" indent="0" marL="0">
-              <a:lnSpc>
-                <a:spcPts val="1820"/>
-              </a:lnSpc>
-              <a:buNone/>
-            </a:pPr>
             <a:r>
               <a:rPr lang="en-US" sz="1300" dirty="0">
                 <a:solidFill>
@@ -10625,12 +10373,6 @@
               </a:rPr>
               <a:t>杂志</a:t>
             </a:r>
-            <a:pPr algn="l" indent="0" marL="0">
-              <a:lnSpc>
-                <a:spcPts val="1820"/>
-              </a:lnSpc>
-              <a:buNone/>
-            </a:pPr>
             <a:r>
               <a:rPr lang="en-US" sz="1300" dirty="0">
                 <a:solidFill>
@@ -10757,12 +10499,6 @@
               </a:rPr>
               <a:t>Read, annotate, and answer questions about </a:t>
             </a:r>
-            <a:pPr algn="l" indent="0" marL="0">
-              <a:lnSpc>
-                <a:spcPts val="1820"/>
-              </a:lnSpc>
-              <a:buNone/>
-            </a:pPr>
             <a:r>
               <a:rPr lang="en-US" sz="1300" b="1" dirty="0">
                 <a:solidFill>
@@ -10774,12 +10510,6 @@
               </a:rPr>
               <a:t>Text 2</a:t>
             </a:r>
-            <a:pPr algn="l" indent="0" marL="0">
-              <a:lnSpc>
-                <a:spcPts val="1820"/>
-              </a:lnSpc>
-              <a:buNone/>
-            </a:pPr>
             <a:r>
               <a:rPr lang="en-US" sz="1300" dirty="0">
                 <a:solidFill>
@@ -12059,9 +11789,6 @@
               </a:rPr>
               <a:t>Pattern: </a:t>
             </a:r>
-            <a:pPr algn="l" indent="0" marL="0">
-              <a:buNone/>
-            </a:pPr>
             <a:r>
               <a:rPr lang="en-US" sz="900" b="1" dirty="0">
                 <a:solidFill>
@@ -12073,9 +11800,6 @@
               </a:rPr>
               <a:t>prefix</a:t>
             </a:r>
-            <a:pPr algn="l" indent="0" marL="0">
-              <a:buNone/>
-            </a:pPr>
             <a:r>
               <a:rPr lang="en-US" sz="900" dirty="0">
                 <a:solidFill>
@@ -12087,9 +11811,6 @@
               </a:rPr>
               <a:t> + </a:t>
             </a:r>
-            <a:pPr algn="l" indent="0" marL="0">
-              <a:buNone/>
-            </a:pPr>
             <a:r>
               <a:rPr lang="en-US" sz="900" b="1" dirty="0">
                 <a:solidFill>
@@ -12101,9 +11822,6 @@
               </a:rPr>
               <a:t>画儿</a:t>
             </a:r>
-            <a:pPr algn="l" indent="0" marL="0">
-              <a:buNone/>
-            </a:pPr>
             <a:r>
               <a:rPr lang="en-US" sz="900" dirty="0">
                 <a:solidFill>
@@ -12895,12 +12613,6 @@
               </a:rPr>
               <a:t>Preview · </a:t>
             </a:r>
-            <a:pPr algn="l" indent="0" marL="0">
-              <a:spcAft>
-                <a:spcPts val="300"/>
-              </a:spcAft>
-              <a:buNone/>
-            </a:pPr>
             <a:r>
               <a:rPr lang="en-US" sz="1000" b="1" dirty="0">
                 <a:solidFill>
@@ -12912,12 +12624,6 @@
               </a:rPr>
               <a:t>都</a:t>
             </a:r>
-            <a:pPr algn="l" indent="0" marL="0">
-              <a:spcAft>
-                <a:spcPts val="300"/>
-              </a:spcAft>
-              <a:buNone/>
-            </a:pPr>
             <a:r>
               <a:rPr lang="en-US" sz="1000" dirty="0">
                 <a:solidFill>
@@ -13049,12 +12755,6 @@
               </a:rPr>
               <a:t>Preview · </a:t>
             </a:r>
-            <a:pPr algn="l" indent="0" marL="0">
-              <a:spcAft>
-                <a:spcPts val="300"/>
-              </a:spcAft>
-              <a:buNone/>
-            </a:pPr>
             <a:r>
               <a:rPr lang="en-US" sz="1000" b="1" dirty="0">
                 <a:solidFill>
@@ -13066,12 +12766,6 @@
               </a:rPr>
               <a:t>正在</a:t>
             </a:r>
-            <a:pPr algn="l" indent="0" marL="0">
-              <a:spcAft>
-                <a:spcPts val="300"/>
-              </a:spcAft>
-              <a:buNone/>
-            </a:pPr>
             <a:r>
               <a:rPr lang="en-US" sz="1000" dirty="0">
                 <a:solidFill>
@@ -13649,12 +13343,6 @@
               </a:rPr>
               <a:t>你有什么</a:t>
             </a:r>
-            <a:pPr algn="l" indent="0" marL="0">
-              <a:lnSpc>
-                <a:spcPts val="2610"/>
-              </a:lnSpc>
-              <a:buNone/>
-            </a:pPr>
             <a:r>
               <a:rPr lang="en-US" sz="1800" b="1" dirty="0">
                 <a:solidFill>
@@ -13666,12 +13354,6 @@
               </a:rPr>
               <a:t>爱好</a:t>
             </a:r>
-            <a:pPr algn="l" indent="0" marL="0">
-              <a:lnSpc>
-                <a:spcPts val="2610"/>
-              </a:lnSpc>
-              <a:buNone/>
-            </a:pPr>
             <a:r>
               <a:rPr lang="en-US" sz="1800" dirty="0">
                 <a:solidFill>
@@ -13796,12 +13478,6 @@
               </a:rPr>
               <a:t>我喜欢看</a:t>
             </a:r>
-            <a:pPr algn="l" indent="0" marL="0">
-              <a:lnSpc>
-                <a:spcPts val="2610"/>
-              </a:lnSpc>
-              <a:buNone/>
-            </a:pPr>
             <a:r>
               <a:rPr lang="en-US" sz="1800" b="1" dirty="0">
                 <a:solidFill>
@@ -13813,12 +13489,6 @@
               </a:rPr>
               <a:t>小说</a:t>
             </a:r>
-            <a:pPr algn="l" indent="0" marL="0">
-              <a:lnSpc>
-                <a:spcPts val="2610"/>
-              </a:lnSpc>
-              <a:buNone/>
-            </a:pPr>
             <a:r>
               <a:rPr lang="en-US" sz="1800" dirty="0">
                 <a:solidFill>
@@ -13830,12 +13500,6 @@
               </a:rPr>
               <a:t>和</a:t>
             </a:r>
-            <a:pPr algn="l" indent="0" marL="0">
-              <a:lnSpc>
-                <a:spcPts val="2610"/>
-              </a:lnSpc>
-              <a:buNone/>
-            </a:pPr>
             <a:r>
               <a:rPr lang="en-US" sz="1800" b="1" dirty="0">
                 <a:solidFill>
@@ -13847,12 +13511,6 @@
               </a:rPr>
               <a:t>杂志</a:t>
             </a:r>
-            <a:pPr algn="l" indent="0" marL="0">
-              <a:lnSpc>
-                <a:spcPts val="2610"/>
-              </a:lnSpc>
-              <a:buNone/>
-            </a:pPr>
             <a:r>
               <a:rPr lang="en-US" sz="1800" dirty="0">
                 <a:solidFill>
@@ -13977,12 +13635,6 @@
               </a:rPr>
               <a:t>你喜欢</a:t>
             </a:r>
-            <a:pPr algn="l" indent="0" marL="0">
-              <a:lnSpc>
-                <a:spcPts val="2610"/>
-              </a:lnSpc>
-              <a:buNone/>
-            </a:pPr>
             <a:r>
               <a:rPr lang="en-US" sz="1800" b="1" dirty="0">
                 <a:solidFill>
@@ -13994,12 +13646,6 @@
               </a:rPr>
               <a:t>画画儿</a:t>
             </a:r>
-            <a:pPr algn="l" indent="0" marL="0">
-              <a:lnSpc>
-                <a:spcPts val="2610"/>
-              </a:lnSpc>
-              <a:buNone/>
-            </a:pPr>
             <a:r>
               <a:rPr lang="en-US" sz="1800" dirty="0">
                 <a:solidFill>
@@ -14124,12 +13770,6 @@
               </a:rPr>
               <a:t>油画儿</a:t>
             </a:r>
-            <a:pPr algn="l" indent="0" marL="0">
-              <a:lnSpc>
-                <a:spcPts val="2610"/>
-              </a:lnSpc>
-              <a:buNone/>
-            </a:pPr>
             <a:r>
               <a:rPr lang="en-US" sz="1800" dirty="0">
                 <a:solidFill>
@@ -14141,12 +13781,6 @@
               </a:rPr>
               <a:t>、</a:t>
             </a:r>
-            <a:pPr algn="l" indent="0" marL="0">
-              <a:lnSpc>
-                <a:spcPts val="2610"/>
-              </a:lnSpc>
-              <a:buNone/>
-            </a:pPr>
             <a:r>
               <a:rPr lang="en-US" sz="1800" b="1" dirty="0">
                 <a:solidFill>
@@ -14158,12 +13792,6 @@
               </a:rPr>
               <a:t>水彩画儿</a:t>
             </a:r>
-            <a:pPr algn="l" indent="0" marL="0">
-              <a:lnSpc>
-                <a:spcPts val="2610"/>
-              </a:lnSpc>
-              <a:buNone/>
-            </a:pPr>
             <a:r>
               <a:rPr lang="en-US" sz="1800" dirty="0">
                 <a:solidFill>
@@ -14175,12 +13803,6 @@
               </a:rPr>
               <a:t>，我</a:t>
             </a:r>
-            <a:pPr algn="l" indent="0" marL="0">
-              <a:lnSpc>
-                <a:spcPts val="2610"/>
-              </a:lnSpc>
-              <a:buNone/>
-            </a:pPr>
             <a:r>
               <a:rPr lang="en-US" sz="1800" b="1" dirty="0">
                 <a:solidFill>
@@ -14192,12 +13814,6 @@
               </a:rPr>
               <a:t>都</a:t>
             </a:r>
-            <a:pPr algn="l" indent="0" marL="0">
-              <a:lnSpc>
-                <a:spcPts val="2610"/>
-              </a:lnSpc>
-              <a:buNone/>
-            </a:pPr>
             <a:r>
               <a:rPr lang="en-US" sz="1800" dirty="0">
                 <a:solidFill>
@@ -14209,12 +13825,6 @@
               </a:rPr>
               <a:t>喜欢画。我</a:t>
             </a:r>
-            <a:pPr algn="l" indent="0" marL="0">
-              <a:lnSpc>
-                <a:spcPts val="2610"/>
-              </a:lnSpc>
-              <a:buNone/>
-            </a:pPr>
             <a:r>
               <a:rPr lang="en-US" sz="1800" b="1" dirty="0">
                 <a:solidFill>
@@ -14226,12 +13836,6 @@
               </a:rPr>
               <a:t>正在</a:t>
             </a:r>
-            <a:pPr algn="l" indent="0" marL="0">
-              <a:lnSpc>
-                <a:spcPts val="2610"/>
-              </a:lnSpc>
-              <a:buNone/>
-            </a:pPr>
             <a:r>
               <a:rPr lang="en-US" sz="1800" dirty="0">
                 <a:solidFill>
@@ -14243,12 +13847,6 @@
               </a:rPr>
               <a:t>学画</a:t>
             </a:r>
-            <a:pPr algn="l" indent="0" marL="0">
-              <a:lnSpc>
-                <a:spcPts val="2610"/>
-              </a:lnSpc>
-              <a:buNone/>
-            </a:pPr>
             <a:r>
               <a:rPr lang="en-US" sz="1800" b="1" dirty="0">
                 <a:solidFill>
@@ -14260,12 +13858,6 @@
               </a:rPr>
               <a:t>国画儿</a:t>
             </a:r>
-            <a:pPr algn="l" indent="0" marL="0">
-              <a:lnSpc>
-                <a:spcPts val="2610"/>
-              </a:lnSpc>
-              <a:buNone/>
-            </a:pPr>
             <a:r>
               <a:rPr lang="en-US" sz="1800" dirty="0">
                 <a:solidFill>
@@ -14390,12 +13982,6 @@
               </a:rPr>
               <a:t>我也在学画</a:t>
             </a:r>
-            <a:pPr algn="l" indent="0" marL="0">
-              <a:lnSpc>
-                <a:spcPts val="2610"/>
-              </a:lnSpc>
-              <a:buNone/>
-            </a:pPr>
             <a:r>
               <a:rPr lang="en-US" sz="1800" b="1" dirty="0">
                 <a:solidFill>
@@ -14407,12 +13993,6 @@
               </a:rPr>
               <a:t>国画儿</a:t>
             </a:r>
-            <a:pPr algn="l" indent="0" marL="0">
-              <a:lnSpc>
-                <a:spcPts val="2610"/>
-              </a:lnSpc>
-              <a:buNone/>
-            </a:pPr>
             <a:r>
               <a:rPr lang="en-US" sz="1800" dirty="0">
                 <a:solidFill>
@@ -16252,9 +15832,6 @@
               </a:rPr>
               <a:t>你喜欢看小说吗？用中文回答。</a:t>
             </a:r>
-            <a:pPr algn="l" indent="0" marL="0">
-              <a:buNone/>
-            </a:pPr>
             <a:r>
               <a:rPr lang="en-US" sz="800" b="1" dirty="0">
                 <a:solidFill>
@@ -16799,15 +16376,6 @@
               </a:rPr>
               <a:t>What's the difference between </a:t>
             </a:r>
-            <a:pPr algn="l" indent="0" marL="0">
-              <a:lnSpc>
-                <a:spcPts val="1755"/>
-              </a:lnSpc>
-              <a:spcAft>
-                <a:spcPts val="400"/>
-              </a:spcAft>
-              <a:buNone/>
-            </a:pPr>
             <a:r>
               <a:rPr lang="en-US" sz="1300" b="1" dirty="0">
                 <a:solidFill>
@@ -16819,15 +16387,6 @@
               </a:rPr>
               <a:t>小说</a:t>
             </a:r>
-            <a:pPr algn="l" indent="0" marL="0">
-              <a:lnSpc>
-                <a:spcPts val="1755"/>
-              </a:lnSpc>
-              <a:spcAft>
-                <a:spcPts val="400"/>
-              </a:spcAft>
-              <a:buNone/>
-            </a:pPr>
             <a:r>
               <a:rPr lang="en-US" sz="1300" dirty="0">
                 <a:solidFill>
@@ -16839,15 +16398,6 @@
               </a:rPr>
               <a:t> and </a:t>
             </a:r>
-            <a:pPr algn="l" indent="0" marL="0">
-              <a:lnSpc>
-                <a:spcPts val="1755"/>
-              </a:lnSpc>
-              <a:spcAft>
-                <a:spcPts val="400"/>
-              </a:spcAft>
-              <a:buNone/>
-            </a:pPr>
             <a:r>
               <a:rPr lang="en-US" sz="1300" b="1" dirty="0">
                 <a:solidFill>
@@ -16859,15 +16409,6 @@
               </a:rPr>
               <a:t>杂志</a:t>
             </a:r>
-            <a:pPr algn="l" indent="0" marL="0">
-              <a:lnSpc>
-                <a:spcPts val="1755"/>
-              </a:lnSpc>
-              <a:spcAft>
-                <a:spcPts val="400"/>
-              </a:spcAft>
-              <a:buNone/>
-            </a:pPr>
             <a:r>
               <a:rPr lang="en-US" sz="1300" dirty="0">
                 <a:solidFill>
@@ -17112,15 +16653,6 @@
               </a:rPr>
               <a:t>Can you spot </a:t>
             </a:r>
-            <a:pPr algn="l" indent="0" marL="0">
-              <a:lnSpc>
-                <a:spcPts val="1755"/>
-              </a:lnSpc>
-              <a:spcAft>
-                <a:spcPts val="400"/>
-              </a:spcAft>
-              <a:buNone/>
-            </a:pPr>
             <a:r>
               <a:rPr lang="en-US" sz="1300" b="1" dirty="0">
                 <a:solidFill>
@@ -17132,15 +16664,6 @@
               </a:rPr>
               <a:t>都</a:t>
             </a:r>
-            <a:pPr algn="l" indent="0" marL="0">
-              <a:lnSpc>
-                <a:spcPts val="1755"/>
-              </a:lnSpc>
-              <a:spcAft>
-                <a:spcPts val="400"/>
-              </a:spcAft>
-              <a:buNone/>
-            </a:pPr>
             <a:r>
               <a:rPr lang="en-US" sz="1300" dirty="0">
                 <a:solidFill>
@@ -17385,15 +16908,6 @@
               </a:rPr>
               <a:t>What does </a:t>
             </a:r>
-            <a:pPr algn="l" indent="0" marL="0">
-              <a:lnSpc>
-                <a:spcPts val="1755"/>
-              </a:lnSpc>
-              <a:spcAft>
-                <a:spcPts val="400"/>
-              </a:spcAft>
-              <a:buNone/>
-            </a:pPr>
             <a:r>
               <a:rPr lang="en-US" sz="1300" b="1" dirty="0">
                 <a:solidFill>
@@ -17405,15 +16919,6 @@
               </a:rPr>
               <a:t>正在</a:t>
             </a:r>
-            <a:pPr algn="l" indent="0" marL="0">
-              <a:lnSpc>
-                <a:spcPts val="1755"/>
-              </a:lnSpc>
-              <a:spcAft>
-                <a:spcPts val="400"/>
-              </a:spcAft>
-              <a:buNone/>
-            </a:pPr>
             <a:r>
               <a:rPr lang="en-US" sz="1300" dirty="0">
                 <a:solidFill>
@@ -18036,12 +17541,6 @@
               </a:rPr>
               <a:t>小说</a:t>
             </a:r>
-            <a:pPr algn="l" indent="0" marL="0">
-              <a:lnSpc>
-                <a:spcPts val="1800"/>
-              </a:lnSpc>
-              <a:buNone/>
-            </a:pPr>
             <a:r>
               <a:rPr lang="en-US" sz="1200" dirty="0">
                 <a:solidFill>
@@ -18053,12 +17552,6 @@
               </a:rPr>
               <a:t> = </a:t>
             </a:r>
-            <a:pPr algn="l" indent="0" marL="0">
-              <a:lnSpc>
-                <a:spcPts val="1800"/>
-              </a:lnSpc>
-              <a:buNone/>
-            </a:pPr>
             <a:r>
               <a:rPr lang="en-US" sz="1200" b="1" dirty="0">
                 <a:solidFill>
@@ -18070,12 +17563,6 @@
               </a:rPr>
               <a:t>novel</a:t>
             </a:r>
-            <a:pPr algn="l" indent="0" marL="0">
-              <a:lnSpc>
-                <a:spcPts val="1800"/>
-              </a:lnSpc>
-              <a:buNone/>
-            </a:pPr>
             <a:r>
               <a:rPr lang="en-US" sz="1200" dirty="0">
                 <a:solidFill>
@@ -18087,12 +17574,6 @@
               </a:rPr>
               <a:t> — a long work of fiction you read cover to cover. </a:t>
             </a:r>
-            <a:pPr algn="l" indent="0" marL="0">
-              <a:lnSpc>
-                <a:spcPts val="1800"/>
-              </a:lnSpc>
-              <a:buNone/>
-            </a:pPr>
             <a:r>
               <a:rPr lang="en-US" sz="1200" b="1" dirty="0">
                 <a:solidFill>
@@ -18104,12 +17585,6 @@
               </a:rPr>
               <a:t>杂志</a:t>
             </a:r>
-            <a:pPr algn="l" indent="0" marL="0">
-              <a:lnSpc>
-                <a:spcPts val="1800"/>
-              </a:lnSpc>
-              <a:buNone/>
-            </a:pPr>
             <a:r>
               <a:rPr lang="en-US" sz="1200" dirty="0">
                 <a:solidFill>
@@ -18121,12 +17596,6 @@
               </a:rPr>
               <a:t> = </a:t>
             </a:r>
-            <a:pPr algn="l" indent="0" marL="0">
-              <a:lnSpc>
-                <a:spcPts val="1800"/>
-              </a:lnSpc>
-              <a:buNone/>
-            </a:pPr>
             <a:r>
               <a:rPr lang="en-US" sz="1200" b="1" dirty="0">
                 <a:solidFill>
@@ -18138,12 +17607,6 @@
               </a:rPr>
               <a:t>magazine</a:t>
             </a:r>
-            <a:pPr algn="l" indent="0" marL="0">
-              <a:lnSpc>
-                <a:spcPts val="1800"/>
-              </a:lnSpc>
-              <a:buNone/>
-            </a:pPr>
             <a:r>
               <a:rPr lang="en-US" sz="1200" dirty="0">
                 <a:solidFill>
@@ -18346,12 +17809,26 @@
               </a:rPr>
               <a:t>油画儿、水彩画儿，我都喜欢画。</a:t>
             </a:r>
+            <a:endParaRPr lang="en-US" sz="1200" dirty="0"/>
+          </a:p>
+          <a:p>
             <a:pPr algn="l" indent="0" marL="0">
               <a:lnSpc>
                 <a:spcPts val="1800"/>
               </a:lnSpc>
               <a:buNone/>
             </a:pPr>
+            <a:r>
+              <a:rPr lang="en-US" sz="1200" dirty="0">
+                <a:solidFill>
+                  <a:srgbClr val="1E2A38"/>
+                </a:solidFill>
+                <a:latin typeface="Noto Sans SC" pitchFamily="34" charset="0"/>
+                <a:ea typeface="Noto Sans SC" pitchFamily="34" charset="-122"/>
+                <a:cs typeface="Noto Sans SC" pitchFamily="34" charset="-120"/>
+              </a:rPr>
+              <a:t>"Oil painting, watercolour — I like painting </a:t>
+            </a:r>
             <a:endParaRPr lang="en-US" sz="1200" dirty="0"/>
           </a:p>
           <a:p>
@@ -18362,6 +17839,17 @@
               <a:buNone/>
             </a:pPr>
             <a:r>
+              <a:rPr lang="en-US" sz="1200" b="1" dirty="0">
+                <a:solidFill>
+                  <a:srgbClr val="1E2A38"/>
+                </a:solidFill>
+                <a:latin typeface="Noto Sans SC" pitchFamily="34" charset="0"/>
+                <a:ea typeface="Noto Sans SC" pitchFamily="34" charset="-122"/>
+                <a:cs typeface="Noto Sans SC" pitchFamily="34" charset="-120"/>
+              </a:rPr>
+              <a:t>both</a:t>
+            </a:r>
+            <a:r>
               <a:rPr lang="en-US" sz="1200" dirty="0">
                 <a:solidFill>
                   <a:srgbClr val="1E2A38"/>
@@ -18370,51 +17858,8 @@
                 <a:ea typeface="Noto Sans SC" pitchFamily="34" charset="-122"/>
                 <a:cs typeface="Noto Sans SC" pitchFamily="34" charset="-120"/>
               </a:rPr>
-              <a:t>"Oil painting, watercolour — I like painting </a:t>
-            </a:r>
-            <a:endParaRPr lang="en-US" sz="1200" dirty="0"/>
-          </a:p>
-          <a:p>
-            <a:pPr algn="l" indent="0" marL="0">
-              <a:lnSpc>
-                <a:spcPts val="1800"/>
-              </a:lnSpc>
-              <a:buNone/>
-            </a:pPr>
-            <a:r>
-              <a:rPr lang="en-US" sz="1200" b="1" dirty="0">
-                <a:solidFill>
-                  <a:srgbClr val="1E2A38"/>
-                </a:solidFill>
-                <a:latin typeface="Noto Sans SC" pitchFamily="34" charset="0"/>
-                <a:ea typeface="Noto Sans SC" pitchFamily="34" charset="-122"/>
-                <a:cs typeface="Noto Sans SC" pitchFamily="34" charset="-120"/>
-              </a:rPr>
-              <a:t>both</a:t>
-            </a:r>
-            <a:pPr algn="l" indent="0" marL="0">
-              <a:lnSpc>
-                <a:spcPts val="1800"/>
-              </a:lnSpc>
-              <a:buNone/>
-            </a:pPr>
-            <a:r>
-              <a:rPr lang="en-US" sz="1200" dirty="0">
-                <a:solidFill>
-                  <a:srgbClr val="1E2A38"/>
-                </a:solidFill>
-                <a:latin typeface="Noto Sans SC" pitchFamily="34" charset="0"/>
-                <a:ea typeface="Noto Sans SC" pitchFamily="34" charset="-122"/>
-                <a:cs typeface="Noto Sans SC" pitchFamily="34" charset="-120"/>
-              </a:rPr>
               <a:t>." </a:t>
             </a:r>
-            <a:pPr algn="l" indent="0" marL="0">
-              <a:lnSpc>
-                <a:spcPts val="1800"/>
-              </a:lnSpc>
-              <a:buNone/>
-            </a:pPr>
             <a:r>
               <a:rPr lang="en-US" sz="900" b="1" dirty="0">
                 <a:solidFill>
@@ -18617,12 +18062,6 @@
               </a:rPr>
               <a:t>正在</a:t>
             </a:r>
-            <a:pPr algn="l" indent="0" marL="0">
-              <a:lnSpc>
-                <a:spcPts val="1950"/>
-              </a:lnSpc>
-              <a:buNone/>
-            </a:pPr>
             <a:r>
               <a:rPr lang="en-US" sz="1200" dirty="0">
                 <a:solidFill>
@@ -18634,12 +18073,6 @@
               </a:rPr>
               <a:t> marks an action </a:t>
             </a:r>
-            <a:pPr algn="l" indent="0" marL="0">
-              <a:lnSpc>
-                <a:spcPts val="1950"/>
-              </a:lnSpc>
-              <a:buNone/>
-            </a:pPr>
             <a:r>
               <a:rPr lang="en-US" sz="1200" b="1" dirty="0">
                 <a:solidFill>
@@ -18651,12 +18084,6 @@
               </a:rPr>
               <a:t>happening right now</a:t>
             </a:r>
-            <a:pPr algn="l" indent="0" marL="0">
-              <a:lnSpc>
-                <a:spcPts val="1950"/>
-              </a:lnSpc>
-              <a:buNone/>
-            </a:pPr>
             <a:r>
               <a:rPr lang="en-US" sz="1200" dirty="0">
                 <a:solidFill>
@@ -18668,12 +18095,6 @@
               </a:rPr>
               <a:t>, at this moment. </a:t>
             </a:r>
-            <a:pPr algn="l" indent="0" marL="0">
-              <a:lnSpc>
-                <a:spcPts val="1950"/>
-              </a:lnSpc>
-              <a:buNone/>
-            </a:pPr>
             <a:r>
               <a:rPr lang="en-US" sz="1300" b="1" dirty="0">
                 <a:solidFill>
@@ -18685,12 +18106,6 @@
               </a:rPr>
               <a:t>我正在学画国画儿。</a:t>
             </a:r>
-            <a:pPr algn="l" indent="0" marL="0">
-              <a:lnSpc>
-                <a:spcPts val="1950"/>
-              </a:lnSpc>
-              <a:buNone/>
-            </a:pPr>
             <a:r>
               <a:rPr lang="en-US" sz="1200" dirty="0">
                 <a:solidFill>
@@ -18702,12 +18117,6 @@
               </a:rPr>
               <a:t> = "I am </a:t>
             </a:r>
-            <a:pPr algn="l" indent="0" marL="0">
-              <a:lnSpc>
-                <a:spcPts val="1950"/>
-              </a:lnSpc>
-              <a:buNone/>
-            </a:pPr>
             <a:r>
               <a:rPr lang="en-US" sz="1200" b="1" i="1" dirty="0">
                 <a:solidFill>
@@ -18719,12 +18128,6 @@
               </a:rPr>
               <a:t>currently</a:t>
             </a:r>
-            <a:pPr algn="l" indent="0" marL="0">
-              <a:lnSpc>
-                <a:spcPts val="1950"/>
-              </a:lnSpc>
-              <a:buNone/>
-            </a:pPr>
             <a:r>
               <a:rPr lang="en-US" sz="1200" dirty="0">
                 <a:solidFill>
@@ -18736,12 +18139,6 @@
               </a:rPr>
               <a:t> learning to paint Chinese painting." </a:t>
             </a:r>
-            <a:pPr algn="l" indent="0" marL="0">
-              <a:lnSpc>
-                <a:spcPts val="1950"/>
-              </a:lnSpc>
-              <a:buNone/>
-            </a:pPr>
             <a:r>
               <a:rPr lang="en-US" sz="900" b="1" dirty="0">
                 <a:solidFill>
@@ -20483,12 +19880,6 @@
               </a:rPr>
               <a:t>Circle </a:t>
             </a:r>
-            <a:pPr algn="l" indent="0" marL="0">
-              <a:lnSpc>
-                <a:spcPts val="1485"/>
-              </a:lnSpc>
-              <a:buNone/>
-            </a:pPr>
             <a:r>
               <a:rPr lang="en-US" sz="1100" b="1" dirty="0">
                 <a:solidFill>
@@ -20500,12 +19891,6 @@
               </a:rPr>
               <a:t>都</a:t>
             </a:r>
-            <a:pPr algn="l" indent="0" marL="0">
-              <a:lnSpc>
-                <a:spcPts val="1485"/>
-              </a:lnSpc>
-              <a:buNone/>
-            </a:pPr>
             <a:r>
               <a:rPr lang="en-US" sz="1100" dirty="0">
                 <a:solidFill>
@@ -20517,12 +19902,6 @@
               </a:rPr>
               <a:t> and </a:t>
             </a:r>
-            <a:pPr algn="l" indent="0" marL="0">
-              <a:lnSpc>
-                <a:spcPts val="1485"/>
-              </a:lnSpc>
-              <a:buNone/>
-            </a:pPr>
             <a:r>
               <a:rPr lang="en-US" sz="1100" b="1" dirty="0">
                 <a:solidFill>
@@ -20808,12 +20187,6 @@
               </a:rPr>
               <a:t>Also annotate the </a:t>
             </a:r>
-            <a:pPr algn="l" indent="0" marL="0">
-              <a:lnSpc>
-                <a:spcPts val="1148"/>
-              </a:lnSpc>
-              <a:buNone/>
-            </a:pPr>
             <a:r>
               <a:rPr lang="en-US" sz="850" dirty="0">
                 <a:solidFill>
@@ -20825,12 +20198,6 @@
               </a:rPr>
               <a:t>一边……一边……</a:t>
             </a:r>
-            <a:pPr algn="l" indent="0" marL="0">
-              <a:lnSpc>
-                <a:spcPts val="1148"/>
-              </a:lnSpc>
-              <a:buNone/>
-            </a:pPr>
             <a:r>
               <a:rPr lang="en-US" sz="850" dirty="0">
                 <a:solidFill>
